--- a/gallery/pptx/fixtures/07-theme-fills.pptx
+++ b/gallery/pptx/fixtures/07-theme-fills.pptx
@@ -115,7 +115,7 @@
                 </a:solidFill>
                 <a:latin typeface="Calibri"/>
               </a:rPr>
-              <a:t>Theme fills</a:t>
+              <a:t xml:space="preserve">Theme fills</a:t>
             </a:r>
           </a:p>
         </p:txBody>
@@ -224,7 +224,7 @@
                 </a:solidFill>
                 <a:latin typeface="Calibri"/>
               </a:rPr>
-              <a:t>Fills use schemeClr; resolver maps to theme sRGB</a:t>
+              <a:t xml:space="preserve">Fills use schemeClr; resolver maps to theme sRGB</a:t>
             </a:r>
           </a:p>
         </p:txBody>
